--- a/generated/Tier 1 Broker Scorecards/Resolute Insurance Group LLC_Broker_Scorecard.pptx
+++ b/generated/Tier 1 Broker Scorecards/Resolute Insurance Group LLC_Broker_Scorecard.pptx
@@ -3394,7 +3394,7 @@
                         <a:rPr sz="900">
                           <a:latin typeface="Segoe UI"/>
                         </a:rPr>
-                        <a:t>Tier 1  |  4.52% / 15.00%</a:t>
+                        <a:t>Tier 1  |  3.85% / 15.00%</a:t>
                       </a:r>
                     </a:p>
                   </a:txBody>
@@ -3653,7 +3653,7 @@
                         <a:rPr sz="900">
                           <a:latin typeface="Segoe UI"/>
                         </a:rPr>
-                        <a:t>Fleet Subs: 132  |  Binds: 2</a:t>
+                        <a:t>Fleet Subs: 132  |  Binds: 1</a:t>
                       </a:r>
                     </a:p>
                   </a:txBody>
@@ -3690,7 +3690,7 @@
                         <a:rPr sz="900">
                           <a:latin typeface="Segoe UI"/>
                         </a:rPr>
-                        <a:t>Fleet Bound Premium: $170,122.13</a:t>
+                        <a:t>Fleet Bound Premium: $102,892.92</a:t>
                       </a:r>
                     </a:p>
                   </a:txBody>
@@ -3727,7 +3727,7 @@
                         <a:rPr sz="900">
                           <a:latin typeface="Segoe UI"/>
                         </a:rPr>
-                        <a:t>Fleet Book %: 42.7%</a:t>
+                        <a:t>Fleet Book %: 25.8%</a:t>
                       </a:r>
                     </a:p>
                   </a:txBody>
@@ -3766,7 +3766,7 @@
                         <a:rPr sz="900">
                           <a:latin typeface="Segoe UI"/>
                         </a:rPr>
-                        <a:t>Non-Fleet Subs: 178  |  Binds: 12</a:t>
+                        <a:t>Non-Fleet Subs: 180  |  Binds: 11</a:t>
                       </a:r>
                     </a:p>
                   </a:txBody>
@@ -3803,7 +3803,7 @@
                         <a:rPr sz="900">
                           <a:latin typeface="Segoe UI"/>
                         </a:rPr>
-                        <a:t>Non-Fleet Bound Premium: $228,642.53</a:t>
+                        <a:t>Non-Fleet Bound Premium: $295,871.74</a:t>
                       </a:r>
                     </a:p>
                   </a:txBody>
@@ -3840,7 +3840,7 @@
                         <a:rPr sz="900">
                           <a:latin typeface="Segoe UI"/>
                         </a:rPr>
-                        <a:t>Non-Fleet Book %: 57.3%</a:t>
+                        <a:t>Non-Fleet Book %: 74.2%</a:t>
                       </a:r>
                     </a:p>
                   </a:txBody>
@@ -4428,7 +4428,7 @@
                           </a:solidFill>
                           <a:latin typeface="Segoe UI"/>
                         </a:rPr>
-                        <a:t>29</a:t>
+                        <a:t>31</a:t>
                       </a:r>
                     </a:p>
                   </a:txBody>
@@ -4624,7 +4624,7 @@
                           </a:solidFill>
                           <a:latin typeface="Segoe UI"/>
                         </a:rPr>
-                        <a:t>7.7%</a:t>
+                        <a:t>6.6%</a:t>
                       </a:r>
                     </a:p>
                   </a:txBody>
@@ -4707,7 +4707,7 @@
                           </a:solidFill>
                           <a:latin typeface="Segoe UI"/>
                         </a:rPr>
-                        <a:t>13.8%</a:t>
+                        <a:t>9.7%</a:t>
                       </a:r>
                     </a:p>
                   </a:txBody>
@@ -4906,7 +4906,7 @@
                           </a:solidFill>
                           <a:latin typeface="Segoe UI"/>
                         </a:rPr>
-                        <a:t>7</a:t>
+                        <a:t>6</a:t>
                       </a:r>
                     </a:p>
                   </a:txBody>
@@ -4983,7 +4983,7 @@
                           </a:solidFill>
                           <a:latin typeface="Segoe UI"/>
                         </a:rPr>
-                        <a:t>4</a:t>
+                        <a:t>3</a:t>
                       </a:r>
                     </a:p>
                   </a:txBody>

--- a/generated/Tier 1 Broker Scorecards/Resolute Insurance Group LLC_Broker_Scorecard.pptx
+++ b/generated/Tier 1 Broker Scorecards/Resolute Insurance Group LLC_Broker_Scorecard.pptx
@@ -4428,7 +4428,7 @@
                           </a:solidFill>
                           <a:latin typeface="Segoe UI"/>
                         </a:rPr>
-                        <a:t>31</a:t>
+                        <a:t>32</a:t>
                       </a:r>
                     </a:p>
                   </a:txBody>
@@ -4707,7 +4707,7 @@
                           </a:solidFill>
                           <a:latin typeface="Segoe UI"/>
                         </a:rPr>
-                        <a:t>9.7%</a:t>
+                        <a:t>9.4%</a:t>
                       </a:r>
                     </a:p>
                   </a:txBody>

--- a/generated/Tier 1 Broker Scorecards/Resolute Insurance Group LLC_Broker_Scorecard.pptx
+++ b/generated/Tier 1 Broker Scorecards/Resolute Insurance Group LLC_Broker_Scorecard.pptx
@@ -3394,7 +3394,7 @@
                         <a:rPr sz="900">
                           <a:latin typeface="Segoe UI"/>
                         </a:rPr>
-                        <a:t>Tier 1  |  3.85% / 15.00%</a:t>
+                        <a:t>Tier 1  |  4.10% / 15.00%</a:t>
                       </a:r>
                     </a:p>
                   </a:txBody>
@@ -3690,7 +3690,7 @@
                         <a:rPr sz="900">
                           <a:latin typeface="Segoe UI"/>
                         </a:rPr>
-                        <a:t>Fleet Bound Premium: $102,892.92</a:t>
+                        <a:t>Fleet Bound Premium: $78,895.67</a:t>
                       </a:r>
                     </a:p>
                   </a:txBody>
@@ -3727,7 +3727,7 @@
                         <a:rPr sz="900">
                           <a:latin typeface="Segoe UI"/>
                         </a:rPr>
-                        <a:t>Fleet Book %: 25.8%</a:t>
+                        <a:t>Fleet Book %: 19.8%</a:t>
                       </a:r>
                     </a:p>
                   </a:txBody>
@@ -3766,7 +3766,7 @@
                         <a:rPr sz="900">
                           <a:latin typeface="Segoe UI"/>
                         </a:rPr>
-                        <a:t>Non-Fleet Subs: 180  |  Binds: 11</a:t>
+                        <a:t>Non-Fleet Subs: 185  |  Binds: 12</a:t>
                       </a:r>
                     </a:p>
                   </a:txBody>
@@ -3803,7 +3803,7 @@
                         <a:rPr sz="900">
                           <a:latin typeface="Segoe UI"/>
                         </a:rPr>
-                        <a:t>Non-Fleet Bound Premium: $295,871.74</a:t>
+                        <a:t>Non-Fleet Bound Premium: $319,868.99</a:t>
                       </a:r>
                     </a:p>
                   </a:txBody>
@@ -3840,7 +3840,7 @@
                         <a:rPr sz="900">
                           <a:latin typeface="Segoe UI"/>
                         </a:rPr>
-                        <a:t>Non-Fleet Book %: 74.2%</a:t>
+                        <a:t>Non-Fleet Book %: 80.2%</a:t>
                       </a:r>
                     </a:p>
                   </a:txBody>
@@ -4428,7 +4428,7 @@
                           </a:solidFill>
                           <a:latin typeface="Segoe UI"/>
                         </a:rPr>
-                        <a:t>32</a:t>
+                        <a:t>37</a:t>
                       </a:r>
                     </a:p>
                   </a:txBody>
@@ -4624,7 +4624,7 @@
                           </a:solidFill>
                           <a:latin typeface="Segoe UI"/>
                         </a:rPr>
-                        <a:t>6.6%</a:t>
+                        <a:t>7.7%</a:t>
                       </a:r>
                     </a:p>
                   </a:txBody>
@@ -4664,7 +4664,7 @@
                         <a:rPr sz="800">
                           <a:latin typeface="Segoe UI"/>
                         </a:rPr>
-                        <a:t>15.1%</a:t>
+                        <a:t>13.7%</a:t>
                       </a:r>
                     </a:p>
                   </a:txBody>
@@ -4707,7 +4707,7 @@
                           </a:solidFill>
                           <a:latin typeface="Segoe UI"/>
                         </a:rPr>
-                        <a:t>9.4%</a:t>
+                        <a:t>8.1%</a:t>
                       </a:r>
                     </a:p>
                   </a:txBody>
@@ -4747,7 +4747,7 @@
                         <a:rPr sz="800">
                           <a:latin typeface="Segoe UI"/>
                         </a:rPr>
-                        <a:t>12.7%</a:t>
+                        <a:t>14.3%</a:t>
                       </a:r>
                     </a:p>
                   </a:txBody>
@@ -4906,7 +4906,7 @@
                           </a:solidFill>
                           <a:latin typeface="Segoe UI"/>
                         </a:rPr>
-                        <a:t>6</a:t>
+                        <a:t>7</a:t>
                       </a:r>
                     </a:p>
                   </a:txBody>
@@ -4943,7 +4943,7 @@
                         <a:rPr sz="800">
                           <a:latin typeface="Segoe UI"/>
                         </a:rPr>
-                        <a:t>11</a:t>
+                        <a:t>10</a:t>
                       </a:r>
                     </a:p>
                   </a:txBody>
@@ -5020,7 +5020,7 @@
                         <a:rPr sz="800">
                           <a:latin typeface="Segoe UI"/>
                         </a:rPr>
-                        <a:t>8</a:t>
+                        <a:t>9</a:t>
                       </a:r>
                     </a:p>
                   </a:txBody>

--- a/generated/Tier 1 Broker Scorecards/Resolute Insurance Group LLC_Broker_Scorecard.pptx
+++ b/generated/Tier 1 Broker Scorecards/Resolute Insurance Group LLC_Broker_Scorecard.pptx
@@ -3357,7 +3357,7 @@
                         <a:rPr sz="800">
                           <a:latin typeface="Segoe UI"/>
                         </a:rPr>
-                        <a:t>$1,269,491.86 / $1,245,091.24 / $398,764.66</a:t>
+                        <a:t>$1,269,491.86 / $1,244,461.50 / $398,134.92</a:t>
                       </a:r>
                     </a:p>
                   </a:txBody>
@@ -3394,7 +3394,7 @@
                         <a:rPr sz="900">
                           <a:latin typeface="Segoe UI"/>
                         </a:rPr>
-                        <a:t>Tier 1  |  4.10% / 15.00%</a:t>
+                        <a:t>Tier 1  |  4.38% / 15.00%</a:t>
                       </a:r>
                     </a:p>
                   </a:txBody>
@@ -3690,7 +3690,7 @@
                         <a:rPr sz="900">
                           <a:latin typeface="Segoe UI"/>
                         </a:rPr>
-                        <a:t>Fleet Bound Premium: $78,895.67</a:t>
+                        <a:t>Fleet Bound Premium: $75,493.04</a:t>
                       </a:r>
                     </a:p>
                   </a:txBody>
@@ -3727,7 +3727,7 @@
                         <a:rPr sz="900">
                           <a:latin typeface="Segoe UI"/>
                         </a:rPr>
-                        <a:t>Fleet Book %: 19.8%</a:t>
+                        <a:t>Fleet Book %: 19.0%</a:t>
                       </a:r>
                     </a:p>
                   </a:txBody>
@@ -3766,7 +3766,7 @@
                         <a:rPr sz="900">
                           <a:latin typeface="Segoe UI"/>
                         </a:rPr>
-                        <a:t>Non-Fleet Subs: 185  |  Binds: 12</a:t>
+                        <a:t>Non-Fleet Subs: 188  |  Binds: 13</a:t>
                       </a:r>
                     </a:p>
                   </a:txBody>
@@ -3803,7 +3803,7 @@
                         <a:rPr sz="900">
                           <a:latin typeface="Segoe UI"/>
                         </a:rPr>
-                        <a:t>Non-Fleet Bound Premium: $319,868.99</a:t>
+                        <a:t>Non-Fleet Bound Premium: $322,641.88</a:t>
                       </a:r>
                     </a:p>
                   </a:txBody>
@@ -3840,7 +3840,7 @@
                         <a:rPr sz="900">
                           <a:latin typeface="Segoe UI"/>
                         </a:rPr>
-                        <a:t>Non-Fleet Book %: 80.2%</a:t>
+                        <a:t>Non-Fleet Book %: 81.0%</a:t>
                       </a:r>
                     </a:p>
                   </a:txBody>
@@ -4428,7 +4428,7 @@
                           </a:solidFill>
                           <a:latin typeface="Segoe UI"/>
                         </a:rPr>
-                        <a:t>37</a:t>
+                        <a:t>40</a:t>
                       </a:r>
                     </a:p>
                   </a:txBody>
@@ -4707,7 +4707,7 @@
                           </a:solidFill>
                           <a:latin typeface="Segoe UI"/>
                         </a:rPr>
-                        <a:t>8.1%</a:t>
+                        <a:t>7.5%</a:t>
                       </a:r>
                     </a:p>
                   </a:txBody>
@@ -5262,7 +5262,7 @@
                           </a:solidFill>
                           <a:latin typeface="Segoe UI"/>
                         </a:rPr>
-                        <a:t>$55.3K</a:t>
+                        <a:t>$54.7K</a:t>
                       </a:r>
                     </a:p>
                   </a:txBody>

--- a/generated/Tier 1 Broker Scorecards/Resolute Insurance Group LLC_Broker_Scorecard.pptx
+++ b/generated/Tier 1 Broker Scorecards/Resolute Insurance Group LLC_Broker_Scorecard.pptx
@@ -3394,7 +3394,7 @@
                         <a:rPr sz="900">
                           <a:latin typeface="Segoe UI"/>
                         </a:rPr>
-                        <a:t>Tier 1  |  4.38% / 15.00%</a:t>
+                        <a:t>Tier 1  |  4.01% / 15.00%</a:t>
                       </a:r>
                     </a:p>
                   </a:txBody>
@@ -3653,7 +3653,7 @@
                         <a:rPr sz="900">
                           <a:latin typeface="Segoe UI"/>
                         </a:rPr>
-                        <a:t>Fleet Subs: 132  |  Binds: 1</a:t>
+                        <a:t>Fleet Subs: 135  |  Binds: 1</a:t>
                       </a:r>
                     </a:p>
                   </a:txBody>
@@ -3690,7 +3690,7 @@
                         <a:rPr sz="900">
                           <a:latin typeface="Segoe UI"/>
                         </a:rPr>
-                        <a:t>Fleet Bound Premium: $75,493.04</a:t>
+                        <a:t>Fleet Bound Premium: $79,430.96</a:t>
                       </a:r>
                     </a:p>
                   </a:txBody>
@@ -3727,7 +3727,7 @@
                         <a:rPr sz="900">
                           <a:latin typeface="Segoe UI"/>
                         </a:rPr>
-                        <a:t>Fleet Book %: 19.0%</a:t>
+                        <a:t>Fleet Book %: 20.0%</a:t>
                       </a:r>
                     </a:p>
                   </a:txBody>
@@ -3766,7 +3766,7 @@
                         <a:rPr sz="900">
                           <a:latin typeface="Segoe UI"/>
                         </a:rPr>
-                        <a:t>Non-Fleet Subs: 188  |  Binds: 13</a:t>
+                        <a:t>Non-Fleet Subs: 189  |  Binds: 12</a:t>
                       </a:r>
                     </a:p>
                   </a:txBody>
@@ -3803,7 +3803,7 @@
                         <a:rPr sz="900">
                           <a:latin typeface="Segoe UI"/>
                         </a:rPr>
-                        <a:t>Non-Fleet Bound Premium: $322,641.88</a:t>
+                        <a:t>Non-Fleet Bound Premium: $318,703.96</a:t>
                       </a:r>
                     </a:p>
                   </a:txBody>
@@ -3840,7 +3840,7 @@
                         <a:rPr sz="900">
                           <a:latin typeface="Segoe UI"/>
                         </a:rPr>
-                        <a:t>Non-Fleet Book %: 81.0%</a:t>
+                        <a:t>Non-Fleet Book %: 80.0%</a:t>
                       </a:r>
                     </a:p>
                   </a:txBody>
@@ -4428,7 +4428,7 @@
                           </a:solidFill>
                           <a:latin typeface="Segoe UI"/>
                         </a:rPr>
-                        <a:t>40</a:t>
+                        <a:t>44</a:t>
                       </a:r>
                     </a:p>
                   </a:txBody>
@@ -4664,7 +4664,7 @@
                         <a:rPr sz="800">
                           <a:latin typeface="Segoe UI"/>
                         </a:rPr>
-                        <a:t>13.7%</a:t>
+                        <a:t>15.1%</a:t>
                       </a:r>
                     </a:p>
                   </a:txBody>
@@ -4707,7 +4707,7 @@
                           </a:solidFill>
                           <a:latin typeface="Segoe UI"/>
                         </a:rPr>
-                        <a:t>7.5%</a:t>
+                        <a:t>4.5%</a:t>
                       </a:r>
                     </a:p>
                   </a:txBody>
@@ -4943,7 +4943,7 @@
                         <a:rPr sz="800">
                           <a:latin typeface="Segoe UI"/>
                         </a:rPr>
-                        <a:t>10</a:t>
+                        <a:t>11</a:t>
                       </a:r>
                     </a:p>
                   </a:txBody>
@@ -4983,7 +4983,7 @@
                           </a:solidFill>
                           <a:latin typeface="Segoe UI"/>
                         </a:rPr>
-                        <a:t>3</a:t>
+                        <a:t>2</a:t>
                       </a:r>
                     </a:p>
                   </a:txBody>

--- a/generated/Tier 1 Broker Scorecards/Resolute Insurance Group LLC_Broker_Scorecard.pptx
+++ b/generated/Tier 1 Broker Scorecards/Resolute Insurance Group LLC_Broker_Scorecard.pptx
@@ -4747,7 +4747,7 @@
                         <a:rPr sz="800">
                           <a:latin typeface="Segoe UI"/>
                         </a:rPr>
-                        <a:t>14.3%</a:t>
+                        <a:t>12.7%</a:t>
                       </a:r>
                     </a:p>
                   </a:txBody>
@@ -5020,7 +5020,7 @@
                         <a:rPr sz="800">
                           <a:latin typeface="Segoe UI"/>
                         </a:rPr>
-                        <a:t>9</a:t>
+                        <a:t>8</a:t>
                       </a:r>
                     </a:p>
                   </a:txBody>

--- a/generated/Tier 1 Broker Scorecards/Resolute Insurance Group LLC_Broker_Scorecard.pptx
+++ b/generated/Tier 1 Broker Scorecards/Resolute Insurance Group LLC_Broker_Scorecard.pptx
@@ -3394,7 +3394,7 @@
                         <a:rPr sz="900">
                           <a:latin typeface="Segoe UI"/>
                         </a:rPr>
-                        <a:t>Tier 1  |  4.01% / 15.00%</a:t>
+                        <a:t>Tier 1  |  3.70% / 15.00%</a:t>
                       </a:r>
                     </a:p>
                   </a:txBody>
@@ -3690,7 +3690,7 @@
                         <a:rPr sz="900">
                           <a:latin typeface="Segoe UI"/>
                         </a:rPr>
-                        <a:t>Fleet Bound Premium: $79,430.96</a:t>
+                        <a:t>Fleet Bound Premium: $103,855.66</a:t>
                       </a:r>
                     </a:p>
                   </a:txBody>
@@ -3727,7 +3727,7 @@
                         <a:rPr sz="900">
                           <a:latin typeface="Segoe UI"/>
                         </a:rPr>
-                        <a:t>Fleet Book %: 20.0%</a:t>
+                        <a:t>Fleet Book %: 26.1%</a:t>
                       </a:r>
                     </a:p>
                   </a:txBody>
@@ -3766,7 +3766,7 @@
                         <a:rPr sz="900">
                           <a:latin typeface="Segoe UI"/>
                         </a:rPr>
-                        <a:t>Non-Fleet Subs: 189  |  Binds: 12</a:t>
+                        <a:t>Non-Fleet Subs: 189  |  Binds: 11</a:t>
                       </a:r>
                     </a:p>
                   </a:txBody>
@@ -3803,7 +3803,7 @@
                         <a:rPr sz="900">
                           <a:latin typeface="Segoe UI"/>
                         </a:rPr>
-                        <a:t>Non-Fleet Bound Premium: $318,703.96</a:t>
+                        <a:t>Non-Fleet Bound Premium: $294,279.26</a:t>
                       </a:r>
                     </a:p>
                   </a:txBody>
@@ -3840,7 +3840,7 @@
                         <a:rPr sz="900">
                           <a:latin typeface="Segoe UI"/>
                         </a:rPr>
-                        <a:t>Non-Fleet Book %: 80.0%</a:t>
+                        <a:t>Non-Fleet Book %: 73.9%</a:t>
                       </a:r>
                     </a:p>
                   </a:txBody>
@@ -4624,7 +4624,7 @@
                           </a:solidFill>
                           <a:latin typeface="Segoe UI"/>
                         </a:rPr>
-                        <a:t>7.7%</a:t>
+                        <a:t>6.6%</a:t>
                       </a:r>
                     </a:p>
                   </a:txBody>
@@ -4906,7 +4906,7 @@
                           </a:solidFill>
                           <a:latin typeface="Segoe UI"/>
                         </a:rPr>
-                        <a:t>7</a:t>
+                        <a:t>6</a:t>
                       </a:r>
                     </a:p>
                   </a:txBody>

--- a/generated/Tier 1 Broker Scorecards/Resolute Insurance Group LLC_Broker_Scorecard.pptx
+++ b/generated/Tier 1 Broker Scorecards/Resolute Insurance Group LLC_Broker_Scorecard.pptx
@@ -3690,7 +3690,7 @@
                         <a:rPr sz="900">
                           <a:latin typeface="Segoe UI"/>
                         </a:rPr>
-                        <a:t>Fleet Bound Premium: $103,855.66</a:t>
+                        <a:t>Fleet Bound Premium: $83,148.83</a:t>
                       </a:r>
                     </a:p>
                   </a:txBody>
@@ -3727,7 +3727,7 @@
                         <a:rPr sz="900">
                           <a:latin typeface="Segoe UI"/>
                         </a:rPr>
-                        <a:t>Fleet Book %: 26.1%</a:t>
+                        <a:t>Fleet Book %: 20.9%</a:t>
                       </a:r>
                     </a:p>
                   </a:txBody>
@@ -3803,7 +3803,7 @@
                         <a:rPr sz="900">
                           <a:latin typeface="Segoe UI"/>
                         </a:rPr>
-                        <a:t>Non-Fleet Bound Premium: $294,279.26</a:t>
+                        <a:t>Non-Fleet Bound Premium: $314,986.09</a:t>
                       </a:r>
                     </a:p>
                   </a:txBody>
@@ -3840,7 +3840,7 @@
                         <a:rPr sz="900">
                           <a:latin typeface="Segoe UI"/>
                         </a:rPr>
-                        <a:t>Non-Fleet Book %: 73.9%</a:t>
+                        <a:t>Non-Fleet Book %: 79.1%</a:t>
                       </a:r>
                     </a:p>
                   </a:txBody>
@@ -4428,7 +4428,7 @@
                           </a:solidFill>
                           <a:latin typeface="Segoe UI"/>
                         </a:rPr>
-                        <a:t>44</a:t>
+                        <a:t>45</a:t>
                       </a:r>
                     </a:p>
                   </a:txBody>
@@ -4624,7 +4624,7 @@
                           </a:solidFill>
                           <a:latin typeface="Segoe UI"/>
                         </a:rPr>
-                        <a:t>6.6%</a:t>
+                        <a:t>7.7%</a:t>
                       </a:r>
                     </a:p>
                   </a:txBody>
@@ -4707,7 +4707,7 @@
                           </a:solidFill>
                           <a:latin typeface="Segoe UI"/>
                         </a:rPr>
-                        <a:t>4.5%</a:t>
+                        <a:t>4.4%</a:t>
                       </a:r>
                     </a:p>
                   </a:txBody>
@@ -4747,7 +4747,7 @@
                         <a:rPr sz="800">
                           <a:latin typeface="Segoe UI"/>
                         </a:rPr>
-                        <a:t>12.7%</a:t>
+                        <a:t>14.3%</a:t>
                       </a:r>
                     </a:p>
                   </a:txBody>
@@ -4906,7 +4906,7 @@
                           </a:solidFill>
                           <a:latin typeface="Segoe UI"/>
                         </a:rPr>
-                        <a:t>6</a:t>
+                        <a:t>7</a:t>
                       </a:r>
                     </a:p>
                   </a:txBody>
@@ -5020,7 +5020,7 @@
                         <a:rPr sz="800">
                           <a:latin typeface="Segoe UI"/>
                         </a:rPr>
-                        <a:t>8</a:t>
+                        <a:t>9</a:t>
                       </a:r>
                     </a:p>
                   </a:txBody>

--- a/generated/Tier 1 Broker Scorecards/Resolute Insurance Group LLC_Broker_Scorecard.pptx
+++ b/generated/Tier 1 Broker Scorecards/Resolute Insurance Group LLC_Broker_Scorecard.pptx
@@ -3357,7 +3357,7 @@
                         <a:rPr sz="800">
                           <a:latin typeface="Segoe UI"/>
                         </a:rPr>
-                        <a:t>$1,269,491.86 / $1,244,461.50 / $398,134.92</a:t>
+                        <a:t>$1,269,491.86 / $1,244,715.62 / $398,389.04</a:t>
                       </a:r>
                     </a:p>
                   </a:txBody>
@@ -3394,7 +3394,7 @@
                         <a:rPr sz="900">
                           <a:latin typeface="Segoe UI"/>
                         </a:rPr>
-                        <a:t>Tier 1  |  3.70% / 15.00%</a:t>
+                        <a:t>Tier 1  |  3.68% / 15.00%</a:t>
                       </a:r>
                     </a:p>
                   </a:txBody>
@@ -3653,7 +3653,7 @@
                         <a:rPr sz="900">
                           <a:latin typeface="Segoe UI"/>
                         </a:rPr>
-                        <a:t>Fleet Subs: 135  |  Binds: 1</a:t>
+                        <a:t>Fleet Subs: 137  |  Binds: 2</a:t>
                       </a:r>
                     </a:p>
                   </a:txBody>
@@ -3690,7 +3690,7 @@
                         <a:rPr sz="900">
                           <a:latin typeface="Segoe UI"/>
                         </a:rPr>
-                        <a:t>Fleet Bound Premium: $83,148.83</a:t>
+                        <a:t>Fleet Bound Premium: $213,612.17</a:t>
                       </a:r>
                     </a:p>
                   </a:txBody>
@@ -3727,7 +3727,7 @@
                         <a:rPr sz="900">
                           <a:latin typeface="Segoe UI"/>
                         </a:rPr>
-                        <a:t>Fleet Book %: 20.9%</a:t>
+                        <a:t>Fleet Book %: 53.6%</a:t>
                       </a:r>
                     </a:p>
                   </a:txBody>
@@ -3766,7 +3766,7 @@
                         <a:rPr sz="900">
                           <a:latin typeface="Segoe UI"/>
                         </a:rPr>
-                        <a:t>Non-Fleet Subs: 189  |  Binds: 11</a:t>
+                        <a:t>Non-Fleet Subs: 189  |  Binds: 10</a:t>
                       </a:r>
                     </a:p>
                   </a:txBody>
@@ -3803,7 +3803,7 @@
                         <a:rPr sz="900">
                           <a:latin typeface="Segoe UI"/>
                         </a:rPr>
-                        <a:t>Non-Fleet Bound Premium: $314,986.09</a:t>
+                        <a:t>Non-Fleet Bound Premium: $184,776.87</a:t>
                       </a:r>
                     </a:p>
                   </a:txBody>
@@ -3840,7 +3840,7 @@
                         <a:rPr sz="900">
                           <a:latin typeface="Segoe UI"/>
                         </a:rPr>
-                        <a:t>Non-Fleet Book %: 79.1%</a:t>
+                        <a:t>Non-Fleet Book %: 46.4%</a:t>
                       </a:r>
                     </a:p>
                   </a:txBody>
@@ -4428,7 +4428,7 @@
                           </a:solidFill>
                           <a:latin typeface="Segoe UI"/>
                         </a:rPr>
-                        <a:t>45</a:t>
+                        <a:t>46</a:t>
                       </a:r>
                     </a:p>
                   </a:txBody>
@@ -4624,7 +4624,7 @@
                           </a:solidFill>
                           <a:latin typeface="Segoe UI"/>
                         </a:rPr>
-                        <a:t>7.7%</a:t>
+                        <a:t>6.6%</a:t>
                       </a:r>
                     </a:p>
                   </a:txBody>
@@ -4707,7 +4707,7 @@
                           </a:solidFill>
                           <a:latin typeface="Segoe UI"/>
                         </a:rPr>
-                        <a:t>4.4%</a:t>
+                        <a:t>6.5%</a:t>
                       </a:r>
                     </a:p>
                   </a:txBody>
@@ -4747,7 +4747,7 @@
                         <a:rPr sz="800">
                           <a:latin typeface="Segoe UI"/>
                         </a:rPr>
-                        <a:t>14.3%</a:t>
+                        <a:t>12.7%</a:t>
                       </a:r>
                     </a:p>
                   </a:txBody>
@@ -4906,7 +4906,7 @@
                           </a:solidFill>
                           <a:latin typeface="Segoe UI"/>
                         </a:rPr>
-                        <a:t>7</a:t>
+                        <a:t>6</a:t>
                       </a:r>
                     </a:p>
                   </a:txBody>
@@ -4983,7 +4983,7 @@
                           </a:solidFill>
                           <a:latin typeface="Segoe UI"/>
                         </a:rPr>
-                        <a:t>2</a:t>
+                        <a:t>3</a:t>
                       </a:r>
                     </a:p>
                   </a:txBody>
@@ -5020,7 +5020,7 @@
                         <a:rPr sz="800">
                           <a:latin typeface="Segoe UI"/>
                         </a:rPr>
-                        <a:t>9</a:t>
+                        <a:t>8</a:t>
                       </a:r>
                     </a:p>
                   </a:txBody>
@@ -5262,7 +5262,7 @@
                           </a:solidFill>
                           <a:latin typeface="Segoe UI"/>
                         </a:rPr>
-                        <a:t>$54.7K</a:t>
+                        <a:t>$54.9K</a:t>
                       </a:r>
                     </a:p>
                   </a:txBody>

--- a/generated/Tier 1 Broker Scorecards/Resolute Insurance Group LLC_Broker_Scorecard.pptx
+++ b/generated/Tier 1 Broker Scorecards/Resolute Insurance Group LLC_Broker_Scorecard.pptx
@@ -3357,7 +3357,7 @@
                         <a:rPr sz="800">
                           <a:latin typeface="Segoe UI"/>
                         </a:rPr>
-                        <a:t>$1,269,491.86 / $1,244,715.62 / $398,389.04</a:t>
+                        <a:t>$1,269,491.86 / $1,245,391.65 / $399,065.07</a:t>
                       </a:r>
                     </a:p>
                   </a:txBody>
@@ -3394,7 +3394,7 @@
                         <a:rPr sz="900">
                           <a:latin typeface="Segoe UI"/>
                         </a:rPr>
-                        <a:t>Tier 1  |  3.68% / 15.00%</a:t>
+                        <a:t>Tier 1  |  3.95% / 15.00%</a:t>
                       </a:r>
                     </a:p>
                   </a:txBody>
@@ -3431,7 +3431,7 @@
                         <a:rPr sz="900">
                           <a:latin typeface="Segoe UI"/>
                         </a:rPr>
-                        <a:t>$1,777,288.60  (22.4% achieved)</a:t>
+                        <a:t>$1,777,288.60  (22.5% achieved)</a:t>
                       </a:r>
                     </a:p>
                   </a:txBody>
@@ -3653,7 +3653,7 @@
                         <a:rPr sz="900">
                           <a:latin typeface="Segoe UI"/>
                         </a:rPr>
-                        <a:t>Fleet Subs: 137  |  Binds: 2</a:t>
+                        <a:t>Fleet Subs: 138  |  Binds: 1</a:t>
                       </a:r>
                     </a:p>
                   </a:txBody>
@@ -3690,7 +3690,7 @@
                         <a:rPr sz="900">
                           <a:latin typeface="Segoe UI"/>
                         </a:rPr>
-                        <a:t>Fleet Bound Premium: $213,612.17</a:t>
+                        <a:t>Fleet Bound Premium: $78,889.47</a:t>
                       </a:r>
                     </a:p>
                   </a:txBody>
@@ -3727,7 +3727,7 @@
                         <a:rPr sz="900">
                           <a:latin typeface="Segoe UI"/>
                         </a:rPr>
-                        <a:t>Fleet Book %: 53.6%</a:t>
+                        <a:t>Fleet Book %: 19.8%</a:t>
                       </a:r>
                     </a:p>
                   </a:txBody>
@@ -3766,7 +3766,7 @@
                         <a:rPr sz="900">
                           <a:latin typeface="Segoe UI"/>
                         </a:rPr>
-                        <a:t>Non-Fleet Subs: 189  |  Binds: 10</a:t>
+                        <a:t>Non-Fleet Subs: 191  |  Binds: 12</a:t>
                       </a:r>
                     </a:p>
                   </a:txBody>
@@ -3803,7 +3803,7 @@
                         <a:rPr sz="900">
                           <a:latin typeface="Segoe UI"/>
                         </a:rPr>
-                        <a:t>Non-Fleet Bound Premium: $184,776.87</a:t>
+                        <a:t>Non-Fleet Bound Premium: $320,175.60</a:t>
                       </a:r>
                     </a:p>
                   </a:txBody>
@@ -3840,7 +3840,7 @@
                         <a:rPr sz="900">
                           <a:latin typeface="Segoe UI"/>
                         </a:rPr>
-                        <a:t>Non-Fleet Book %: 46.4%</a:t>
+                        <a:t>Non-Fleet Book %: 80.2%</a:t>
                       </a:r>
                     </a:p>
                   </a:txBody>
@@ -4428,7 +4428,7 @@
                           </a:solidFill>
                           <a:latin typeface="Segoe UI"/>
                         </a:rPr>
-                        <a:t>46</a:t>
+                        <a:t>49</a:t>
                       </a:r>
                     </a:p>
                   </a:txBody>
@@ -4624,7 +4624,7 @@
                           </a:solidFill>
                           <a:latin typeface="Segoe UI"/>
                         </a:rPr>
-                        <a:t>6.6%</a:t>
+                        <a:t>7.7%</a:t>
                       </a:r>
                     </a:p>
                   </a:txBody>
@@ -4707,7 +4707,7 @@
                           </a:solidFill>
                           <a:latin typeface="Segoe UI"/>
                         </a:rPr>
-                        <a:t>6.5%</a:t>
+                        <a:t>6.1%</a:t>
                       </a:r>
                     </a:p>
                   </a:txBody>
@@ -4747,7 +4747,7 @@
                         <a:rPr sz="800">
                           <a:latin typeface="Segoe UI"/>
                         </a:rPr>
-                        <a:t>12.7%</a:t>
+                        <a:t>14.3%</a:t>
                       </a:r>
                     </a:p>
                   </a:txBody>
@@ -4906,7 +4906,7 @@
                           </a:solidFill>
                           <a:latin typeface="Segoe UI"/>
                         </a:rPr>
-                        <a:t>6</a:t>
+                        <a:t>7</a:t>
                       </a:r>
                     </a:p>
                   </a:txBody>
@@ -5020,7 +5020,7 @@
                         <a:rPr sz="800">
                           <a:latin typeface="Segoe UI"/>
                         </a:rPr>
-                        <a:t>8</a:t>
+                        <a:t>9</a:t>
                       </a:r>
                     </a:p>
                   </a:txBody>
@@ -5262,7 +5262,7 @@
                           </a:solidFill>
                           <a:latin typeface="Segoe UI"/>
                         </a:rPr>
-                        <a:t>$54.9K</a:t>
+                        <a:t>$55.6K</a:t>
                       </a:r>
                     </a:p>
                   </a:txBody>

--- a/generated/Tier 1 Broker Scorecards/Resolute Insurance Group LLC_Broker_Scorecard.pptx
+++ b/generated/Tier 1 Broker Scorecards/Resolute Insurance Group LLC_Broker_Scorecard.pptx
@@ -3357,7 +3357,7 @@
                         <a:rPr sz="800">
                           <a:latin typeface="Segoe UI"/>
                         </a:rPr>
-                        <a:t>$1,269,491.86 / $1,245,391.65 / $399,065.07</a:t>
+                        <a:t>$1,269,491.86 / $1,244,982.85 / $398,656.27</a:t>
                       </a:r>
                     </a:p>
                   </a:txBody>
@@ -3394,7 +3394,7 @@
                         <a:rPr sz="900">
                           <a:latin typeface="Segoe UI"/>
                         </a:rPr>
-                        <a:t>Tier 1  |  3.95% / 15.00%</a:t>
+                        <a:t>Tier 1  |  3.94% / 15.00%</a:t>
                       </a:r>
                     </a:p>
                   </a:txBody>
@@ -3431,7 +3431,7 @@
                         <a:rPr sz="900">
                           <a:latin typeface="Segoe UI"/>
                         </a:rPr>
-                        <a:t>$1,777,288.60  (22.5% achieved)</a:t>
+                        <a:t>$1,777,288.60  (22.4% achieved)</a:t>
                       </a:r>
                     </a:p>
                   </a:txBody>
@@ -3653,7 +3653,7 @@
                         <a:rPr sz="900">
                           <a:latin typeface="Segoe UI"/>
                         </a:rPr>
-                        <a:t>Fleet Subs: 138  |  Binds: 1</a:t>
+                        <a:t>Fleet Subs: 139  |  Binds: 2</a:t>
                       </a:r>
                     </a:p>
                   </a:txBody>
@@ -3690,7 +3690,7 @@
                         <a:rPr sz="900">
                           <a:latin typeface="Segoe UI"/>
                         </a:rPr>
-                        <a:t>Fleet Bound Premium: $78,889.47</a:t>
+                        <a:t>Fleet Bound Premium: $203,956.05</a:t>
                       </a:r>
                     </a:p>
                   </a:txBody>
@@ -3727,7 +3727,7 @@
                         <a:rPr sz="900">
                           <a:latin typeface="Segoe UI"/>
                         </a:rPr>
-                        <a:t>Fleet Book %: 19.8%</a:t>
+                        <a:t>Fleet Book %: 51.2%</a:t>
                       </a:r>
                     </a:p>
                   </a:txBody>
@@ -3766,7 +3766,7 @@
                         <a:rPr sz="900">
                           <a:latin typeface="Segoe UI"/>
                         </a:rPr>
-                        <a:t>Non-Fleet Subs: 191  |  Binds: 12</a:t>
+                        <a:t>Non-Fleet Subs: 191  |  Binds: 11</a:t>
                       </a:r>
                     </a:p>
                   </a:txBody>
@@ -3803,7 +3803,7 @@
                         <a:rPr sz="900">
                           <a:latin typeface="Segoe UI"/>
                         </a:rPr>
-                        <a:t>Non-Fleet Bound Premium: $320,175.60</a:t>
+                        <a:t>Non-Fleet Bound Premium: $194,700.22</a:t>
                       </a:r>
                     </a:p>
                   </a:txBody>
@@ -3840,7 +3840,7 @@
                         <a:rPr sz="900">
                           <a:latin typeface="Segoe UI"/>
                         </a:rPr>
-                        <a:t>Non-Fleet Book %: 80.2%</a:t>
+                        <a:t>Non-Fleet Book %: 48.8%</a:t>
                       </a:r>
                     </a:p>
                   </a:txBody>
@@ -4428,7 +4428,7 @@
                           </a:solidFill>
                           <a:latin typeface="Segoe UI"/>
                         </a:rPr>
-                        <a:t>49</a:t>
+                        <a:t>50</a:t>
                       </a:r>
                     </a:p>
                   </a:txBody>
@@ -4624,7 +4624,7 @@
                           </a:solidFill>
                           <a:latin typeface="Segoe UI"/>
                         </a:rPr>
-                        <a:t>7.7%</a:t>
+                        <a:t>6.6%</a:t>
                       </a:r>
                     </a:p>
                   </a:txBody>
@@ -4664,7 +4664,7 @@
                         <a:rPr sz="800">
                           <a:latin typeface="Segoe UI"/>
                         </a:rPr>
-                        <a:t>15.1%</a:t>
+                        <a:t>13.7%</a:t>
                       </a:r>
                     </a:p>
                   </a:txBody>
@@ -4707,7 +4707,7 @@
                           </a:solidFill>
                           <a:latin typeface="Segoe UI"/>
                         </a:rPr>
-                        <a:t>6.1%</a:t>
+                        <a:t>6.0%</a:t>
                       </a:r>
                     </a:p>
                   </a:txBody>
@@ -4906,7 +4906,7 @@
                           </a:solidFill>
                           <a:latin typeface="Segoe UI"/>
                         </a:rPr>
-                        <a:t>7</a:t>
+                        <a:t>6</a:t>
                       </a:r>
                     </a:p>
                   </a:txBody>
@@ -4943,7 +4943,7 @@
                         <a:rPr sz="800">
                           <a:latin typeface="Segoe UI"/>
                         </a:rPr>
-                        <a:t>11</a:t>
+                        <a:t>10</a:t>
                       </a:r>
                     </a:p>
                   </a:txBody>
@@ -5262,7 +5262,7 @@
                           </a:solidFill>
                           <a:latin typeface="Segoe UI"/>
                         </a:rPr>
-                        <a:t>$55.6K</a:t>
+                        <a:t>$55.2K</a:t>
                       </a:r>
                     </a:p>
                   </a:txBody>

--- a/generated/Tier 1 Broker Scorecards/Resolute Insurance Group LLC_Broker_Scorecard.pptx
+++ b/generated/Tier 1 Broker Scorecards/Resolute Insurance Group LLC_Broker_Scorecard.pptx
@@ -4664,7 +4664,7 @@
                         <a:rPr sz="800">
                           <a:latin typeface="Segoe UI"/>
                         </a:rPr>
-                        <a:t>13.7%</a:t>
+                        <a:t>15.1%</a:t>
                       </a:r>
                     </a:p>
                   </a:txBody>
@@ -4943,7 +4943,7 @@
                         <a:rPr sz="800">
                           <a:latin typeface="Segoe UI"/>
                         </a:rPr>
-                        <a:t>10</a:t>
+                        <a:t>11</a:t>
                       </a:r>
                     </a:p>
                   </a:txBody>

--- a/generated/Tier 1 Broker Scorecards/Resolute Insurance Group LLC_Broker_Scorecard.pptx
+++ b/generated/Tier 1 Broker Scorecards/Resolute Insurance Group LLC_Broker_Scorecard.pptx
@@ -3357,7 +3357,7 @@
                         <a:rPr sz="800">
                           <a:latin typeface="Segoe UI"/>
                         </a:rPr>
-                        <a:t>$1,269,491.86 / $1,244,982.85 / $398,656.27</a:t>
+                        <a:t>$1,269,491.86 / $1,235,792.60 / $398,656.27</a:t>
                       </a:r>
                     </a:p>
                   </a:txBody>
@@ -3394,7 +3394,7 @@
                         <a:rPr sz="900">
                           <a:latin typeface="Segoe UI"/>
                         </a:rPr>
-                        <a:t>Tier 1  |  3.94% / 15.00%</a:t>
+                        <a:t>Tier 1  |  4.24% / 15.00%</a:t>
                       </a:r>
                     </a:p>
                   </a:txBody>
@@ -3690,7 +3690,7 @@
                         <a:rPr sz="900">
                           <a:latin typeface="Segoe UI"/>
                         </a:rPr>
-                        <a:t>Fleet Bound Premium: $203,956.05</a:t>
+                        <a:t>Fleet Bound Premium: $169,974.81</a:t>
                       </a:r>
                     </a:p>
                   </a:txBody>
@@ -3727,7 +3727,7 @@
                         <a:rPr sz="900">
                           <a:latin typeface="Segoe UI"/>
                         </a:rPr>
-                        <a:t>Fleet Book %: 51.2%</a:t>
+                        <a:t>Fleet Book %: 42.6%</a:t>
                       </a:r>
                     </a:p>
                   </a:txBody>
@@ -3766,7 +3766,7 @@
                         <a:rPr sz="900">
                           <a:latin typeface="Segoe UI"/>
                         </a:rPr>
-                        <a:t>Non-Fleet Subs: 191  |  Binds: 11</a:t>
+                        <a:t>Non-Fleet Subs: 191  |  Binds: 12</a:t>
                       </a:r>
                     </a:p>
                   </a:txBody>
@@ -3803,7 +3803,7 @@
                         <a:rPr sz="900">
                           <a:latin typeface="Segoe UI"/>
                         </a:rPr>
-                        <a:t>Non-Fleet Bound Premium: $194,700.22</a:t>
+                        <a:t>Non-Fleet Bound Premium: $228,681.46</a:t>
                       </a:r>
                     </a:p>
                   </a:txBody>
@@ -3840,7 +3840,7 @@
                         <a:rPr sz="900">
                           <a:latin typeface="Segoe UI"/>
                         </a:rPr>
-                        <a:t>Non-Fleet Book %: 48.8%</a:t>
+                        <a:t>Non-Fleet Book %: 57.4%</a:t>
                       </a:r>
                     </a:p>
                   </a:txBody>
@@ -4624,7 +4624,7 @@
                           </a:solidFill>
                           <a:latin typeface="Segoe UI"/>
                         </a:rPr>
-                        <a:t>6.6%</a:t>
+                        <a:t>7.7%</a:t>
                       </a:r>
                     </a:p>
                   </a:txBody>
@@ -4906,7 +4906,7 @@
                           </a:solidFill>
                           <a:latin typeface="Segoe UI"/>
                         </a:rPr>
-                        <a:t>6</a:t>
+                        <a:t>7</a:t>
                       </a:r>
                     </a:p>
                   </a:txBody>
